--- a/DBTUNING/ch01_SQL튜닝이란/ch01_교안.pptx
+++ b/DBTUNING/ch01_SQL튜닝이란/ch01_교안.pptx
@@ -540,7 +540,7 @@
           <a:lstStyle/>
           <a:p>
             <a:r>
-              <a:t>제1장은 SQL 튜닝 과정 전체의 출발점으로, 개별 기법을 배우기 전에 성능을 무엇으로 판단할 것인지 기준을 세우는 장이다. 이 과정의 모든 실행계획과 소요 시간은 진료비청구심사 실습 DB에서 직접 캡처한 실측값이며, 강의 중에 학습자가 같은 SQL을 실행해 재현할 수 있다. 첫 시간에 강조할 메시지는 하나다. 튜닝은 문법을 화려하게 쓰는 기술이 아니라 같은 결과를 내는 여러 방법 중 자원을 덜 쓰는 쪽을 실측 근거로 고르는 작업이라는 점이다. 첫 시간에는 학습자가 알고 있는 튜닝 통념을 하나씩 말하게 해 칠판에 적어 두고, 마지막 요약에서 다시 꺼내 검증하면 몰입도가 크게 올라간다.</a:t>
+              <a:t>제ch01은 SQL 튜닝 과정 전체의 출발점으로, 개별 기법을 배우기 전에 성능을 무엇으로 판단할 것인지 기준을 세우는 장이다. 이 과정의 모든 실행계획과 소요 시간은 진료비청구심사 실습 DB에서 직접 캡처한 실측값이며, 강의 중에 학습자가 같은 SQL을 실행해 재현할 수 있다. 첫 시간에 강조할 메시지는 하나다. 튜닝은 문법을 화려하게 쓰는 기술이 아니라 같은 결과를 내는 여러 방법 중 자원을 덜 쓰는 쪽을 실측 근거로 고르는 작업이라는 점이다. 첫 시간에는 학습자가 알고 있는 튜닝 통념을 하나씩 말하게 해 칠판에 적어 두고, 마지막 요약에서 다시 꺼내 검증하면 몰입도가 크게 올라간다.</a:t>
             </a:r>
           </a:p>
         </p:txBody>
@@ -1310,7 +1310,7 @@
           <a:lstStyle/>
           <a:p>
             <a:r>
-              <a:t>학습 목표는 세 묶음이다. 첫째는 정의로, 성능을 시간이 아니라 자원으로 바라보는 관점을 세우는 것이다. 둘째는 도구로, 실행계획에서 Buffers와 Used-Mem을 찾아 읽는 능력이다. 셋째는 태도로, 통념을 실측으로 검증하고 측정 조건까지 의심하는 습관이다. 이 장에는 개선 기법이 하나도 나오지 않는다는 점을 미리 알려 주는 편이 좋다. 판단 기준을 세우는 데까지가 이번 차시의 범위이고, 기법은 2장 이후에 순서대로 다룬다. 목표를 읽어 준 뒤 각 항목이 몇 번 절과 대응되는지 표시해 주면 학습자가 진행 중에 자기 위치를 잃지 않는다.</a:t>
+              <a:t>학습 목표는 세 묶음이다. 첫째는 정의로, 성능을 시간이 아니라 자원으로 바라보는 관점을 세우는 것이다. 둘째는 도구로, 실행계획에서 Buffers와 Used-Mem을 찾아 읽는 능력이다. 셋째는 태도로, 통념을 실측으로 검증하고 측정 조건까지 의심하는 습관이다. 이 장에는 개선 기법이 하나도 나오지 않는다는 점을 미리 알려 주는 편이 좋다. 판단 기준을 세우는 데까지가 이번 차시의 범위이고, 기법은 ch02 이후에 순서대로 다룬다. 목표를 읽어 준 뒤 각 항목이 몇 번 절과 대응되는지 표시해 주면 학습자가 진행 중에 자기 위치를 잃지 않는다.</a:t>
             </a:r>
           </a:p>
         </p:txBody>
@@ -2010,7 +2010,7 @@
           <a:lstStyle/>
           <a:p>
             <a:r>
-              <a:t>여기서 결론까지 다 말해 버리지 않는 편이 좋다. 이번 장의 목표는 이런 일이 실제로 일어난다는 사실을 관찰하는 데까지다. 다만 힌트는 줄 수 있다. 이 SQL이 mc에서 필요로 하는 값은 claim_id 하나뿐이고, 조인 조건상 그 값은 cd.claim_id와 항상 같으며, 두 컬럼 사이에 참조 무결성이 보장되어 있다면 굳이 원본 테이블까지 갈 이유가 없다. 실습문제 4번과 5번이 이 추론을 단계적으로 요구하므로 여기서 생각할 재료만 충분히 남겨 둔다. 이 대목에서 나오는 질문 대부분은 Chapter 7의 내용이므로 질문 목록으로 적어 두었다가 그때 다시 꺼내는 편이 좋다.</a:t>
+              <a:t>여기서 결론까지 다 말해 버리지 않는 편이 좋다. 이번 장의 목표는 이런 일이 실제로 일어난다는 사실을 관찰하는 데까지다. 다만 힌트는 줄 수 있다. 이 SQL이 mc에서 필요로 하는 값은 claim_id 하나뿐이고, 조인 조건상 그 값은 cd.claim_id와 항상 같으며, 두 컬럼 사이에 참조 무결성이 보장되어 있다면 굳이 원본 테이블까지 갈 이유가 없다. 실습문제 4번과 5번이 이 추론을 단계적으로 요구하므로 여기서 생각할 재료만 충분히 남겨 둔다. 이 대목에서 나오는 질문 대부분은 ch09의 내용이므로 질문 목록으로 적어 두었다가 그때 다시 꺼내는 편이 좋다.</a:t>
             </a:r>
           </a:p>
         </p:txBody>
@@ -6287,7 +6287,7 @@
                 </a:solidFill>
                 <a:latin typeface="Malgun Gothic"/>
               </a:rPr>
-              <a:t>Oracle SQL 튜닝 과정  ·  제1장</a:t>
+              <a:t>Oracle SQL 튜닝 과정  ·  제ch01</a:t>
             </a:r>
           </a:p>
         </p:txBody>
@@ -11429,7 +11429,7 @@
                 </a:solidFill>
                 <a:latin typeface="Malgun Gothic"/>
               </a:rPr>
-              <a:t>    –  상세 원리(조인 제거)는 Chapter 7 JOIN 실행 원리에서 다룬다</a:t>
+              <a:t>    –  상세 원리(조인 제거)는 ch09 JOIN 실행 원리에서 다룬다</a:t>
             </a:r>
           </a:p>
         </p:txBody>
@@ -13389,7 +13389,7 @@
                 </a:solidFill>
                 <a:latin typeface="Malgun Gothic"/>
               </a:rPr>
-              <a:t>    –  C 버전은 왜 MEDICAL_CLAIMS 접근을 생략할 수 있었는가 → Chapter 7 JOIN 실행 원리</a:t>
+              <a:t>    –  C 버전은 왜 MEDICAL_CLAIMS 접근을 생략할 수 있었는가 → ch09 JOIN 실행 원리</a:t>
             </a:r>
           </a:p>
           <a:p>
@@ -13648,7 +13648,7 @@
                 </a:solidFill>
                 <a:latin typeface="Malgun Gothic"/>
               </a:rPr>
-              <a:t>•  같은 FROM 절이라도 옵티마이저가 불필요한 테이블 접근을 제거할 수 있다 (Chapter 7)</a:t>
+              <a:t>•  같은 FROM 절이라도 옵티마이저가 불필요한 테이블 접근을 제거할 수 있다 (ch09)</a:t>
             </a:r>
           </a:p>
           <a:p>
@@ -13797,7 +13797,7 @@
                 </a:solidFill>
                 <a:latin typeface="Malgun Gothic"/>
               </a:rPr>
-              <a:t>•  실습문제 10문항 — SQL튜닝_Ch01_문제.md</a:t>
+              <a:t>•  실습문제 10문항 — ch01_문제.md</a:t>
             </a:r>
           </a:p>
           <a:p>

--- a/DBTUNING/ch01_SQL튜닝이란/ch01_교안.pptx
+++ b/DBTUNING/ch01_SQL튜닝이란/ch01_교안.pptx
@@ -540,7 +540,7 @@
           <a:lstStyle/>
           <a:p>
             <a:r>
-              <a:t>제ch01은 SQL 튜닝 과정 전체의 출발점으로, 개별 기법을 배우기 전에 성능을 무엇으로 판단할 것인지 기준을 세우는 장이다. 이 과정의 모든 실행계획과 소요 시간은 진료비청구심사 실습 DB에서 직접 캡처한 실측값이며, 강의 중에 학습자가 같은 SQL을 실행해 재현할 수 있다. 첫 시간에 강조할 메시지는 하나다. 튜닝은 문법을 화려하게 쓰는 기술이 아니라 같은 결과를 내는 여러 방법 중 자원을 덜 쓰는 쪽을 실측 근거로 고르는 작업이라는 점이다. 첫 시간에는 학습자가 알고 있는 튜닝 통념을 하나씩 말하게 해 칠판에 적어 두고, 마지막 요약에서 다시 꺼내 검증하면 몰입도가 크게 올라간다.</a:t>
+              <a:t>ch01은 SQL 튜닝 과정 전체의 출발점으로, 개별 기법을 배우기 전에 성능을 무엇으로 판단할 것인지 기준을 세우는 장이다. 이 과정의 모든 실행계획과 소요 시간은 진료비청구심사 실습 DB에서 직접 캡처한 실측값이며, 강의 중에 학습자가 같은 SQL을 실행해 재현할 수 있다. 첫 시간에 강조할 메시지는 하나다. 튜닝은 문법을 화려하게 쓰는 기술이 아니라 같은 결과를 내는 여러 방법 중 자원을 덜 쓰는 쪽을 실측 근거로 고르는 작업이라는 점이다. 첫 시간에는 학습자가 알고 있는 튜닝 통념을 하나씩 말하게 해 칠판에 적어 두고, 마지막 요약에서 다시 꺼내 검증하면 몰입도가 크게 올라간다.</a:t>
             </a:r>
           </a:p>
         </p:txBody>
@@ -6287,7 +6287,7 @@
                 </a:solidFill>
                 <a:latin typeface="Malgun Gothic"/>
               </a:rPr>
-              <a:t>Oracle SQL 튜닝 과정  ·  제ch01</a:t>
+              <a:t>Oracle SQL 튜닝 과정  ·  ch01</a:t>
             </a:r>
           </a:p>
         </p:txBody>
